--- a/data/deep_dives/carteira_fidc_investcred_credsystem_9474a4e1/exports/documentary_comparison.pptx
+++ b/data/deep_dives/carteira_fidc_investcred_credsystem_9474a4e1/exports/documentary_comparison.pptx
@@ -4286,7 +4286,7 @@
                       <a:r>
                         <a:rPr sz="1300" b="1">
                           <a:solidFill>
-                            <a:srgbClr val="1F1F1F"/>
+                            <a:srgbClr val="FFFFFF"/>
                           </a:solidFill>
                           <a:latin typeface="Calibri"/>
                         </a:rPr>
@@ -4296,7 +4296,7 @@
                   </a:txBody>
                   <a:tcPr marL="91440" marR="91440" marT="41148" marB="41148" anchor="ctr">
                     <a:solidFill>
-                      <a:srgbClr val="EC7000"/>
+                      <a:srgbClr val="FF6200"/>
                     </a:solidFill>
                     <a:lnL>
                       <a:noFill/>
@@ -4335,7 +4335,7 @@
                       <a:r>
                         <a:rPr sz="1300" b="1">
                           <a:solidFill>
-                            <a:srgbClr val="1F1F1F"/>
+                            <a:srgbClr val="FFFFFF"/>
                           </a:solidFill>
                           <a:latin typeface="Calibri"/>
                         </a:rPr>
@@ -4345,7 +4345,7 @@
                   </a:txBody>
                   <a:tcPr marL="91440" marR="91440" marT="41148" marB="41148" anchor="ctr">
                     <a:solidFill>
-                      <a:srgbClr val="EC7000"/>
+                      <a:srgbClr val="FF6200"/>
                     </a:solidFill>
                     <a:lnL>
                       <a:noFill/>
@@ -4725,7 +4725,7 @@
                           </a:solidFill>
                           <a:latin typeface="Calibri"/>
                         </a:rPr>
-                        <a:t>CCB e documentação de lastro; garantia real específica não confirmada no corpus revisto.</a:t>
+                        <a:t>CCB e documentação de lastro</a:t>
                       </a:r>
                     </a:p>
                   </a:txBody>
@@ -5111,7 +5111,7 @@
         </p:nvGraphicFramePr>
         <p:xfrm>
           <a:off x="438912" y="932688"/>
-          <a:ext cx="11313871" cy="2185416"/>
+          <a:ext cx="11313871" cy="1997964"/>
         </p:xfrm>
         <a:graphic>
           <a:graphicData uri="http://schemas.openxmlformats.org/drawingml/2006/table">
@@ -5145,7 +5145,7 @@
                       <a:r>
                         <a:rPr sz="1300" b="1">
                           <a:solidFill>
-                            <a:srgbClr val="1F1F1F"/>
+                            <a:srgbClr val="FFFFFF"/>
                           </a:solidFill>
                           <a:latin typeface="Calibri"/>
                         </a:rPr>
@@ -5155,7 +5155,7 @@
                   </a:txBody>
                   <a:tcPr marL="91440" marR="91440" marT="41148" marB="41148" anchor="ctr">
                     <a:solidFill>
-                      <a:srgbClr val="EC7000"/>
+                      <a:srgbClr val="FF6200"/>
                     </a:solidFill>
                     <a:lnL>
                       <a:noFill/>
@@ -5194,7 +5194,7 @@
                       <a:r>
                         <a:rPr sz="1300" b="1">
                           <a:solidFill>
-                            <a:srgbClr val="1F1F1F"/>
+                            <a:srgbClr val="FFFFFF"/>
                           </a:solidFill>
                           <a:latin typeface="Calibri"/>
                         </a:rPr>
@@ -5204,7 +5204,7 @@
                   </a:txBody>
                   <a:tcPr marL="91440" marR="91440" marT="41148" marB="41148" anchor="ctr">
                     <a:solidFill>
-                      <a:srgbClr val="EC7000"/>
+                      <a:srgbClr val="FF6200"/>
                     </a:solidFill>
                     <a:lnL>
                       <a:noFill/>
@@ -5223,7 +5223,7 @@
                   </a:tcPr>
                 </a:tc>
               </a:tr>
-              <a:tr h="470916">
+              <a:tr h="283464">
                 <a:tc>
                   <a:txBody>
                     <a:bodyPr wrap="square">
@@ -5296,29 +5296,7 @@
                           </a:solidFill>
                           <a:latin typeface="Calibri"/>
                         </a:rPr>
-                        <a:t>Razão mínima de garantia e índice de cobertura definidos no suplemento; piso específico não</a:t>
-                      </a:r>
-                    </a:p>
-                    <a:p>
-                      <a:pPr algn="ctr">
-                        <a:lnSpc>
-                          <a:spcPct val="100000"/>
-                        </a:lnSpc>
-                        <a:spcBef>
-                          <a:spcPts val="0"/>
-                        </a:spcBef>
-                        <a:spcAft>
-                          <a:spcPts val="0"/>
-                        </a:spcAft>
-                      </a:pPr>
-                      <a:r>
-                        <a:rPr sz="1300" b="0">
-                          <a:solidFill>
-                            <a:srgbClr val="1F1F1F"/>
-                          </a:solidFill>
-                          <a:latin typeface="Calibri"/>
-                        </a:rPr>
-                        <a:t>localizado.</a:t>
+                        <a:t>Razão mínima de garantia e índice de cobertura definidos no suplemento</a:t>
                       </a:r>
                     </a:p>
                   </a:txBody>
@@ -5748,7 +5726,7 @@
                           </a:solidFill>
                           <a:latin typeface="Calibri"/>
                         </a:rPr>
-                        <a:t>Provisão conforme metodologia do Anexo IV e manual da administradora; piso uniforme não confirmado.</a:t>
+                        <a:t>Provisão conforme metodologia do Anexo IV e manual da administradora</a:t>
                       </a:r>
                     </a:p>
                   </a:txBody>
@@ -5918,7 +5896,7 @@
         </p:nvGraphicFramePr>
         <p:xfrm>
           <a:off x="438912" y="932688"/>
-          <a:ext cx="11313871" cy="2656332"/>
+          <a:ext cx="11313871" cy="2468880"/>
         </p:xfrm>
         <a:graphic>
           <a:graphicData uri="http://schemas.openxmlformats.org/drawingml/2006/table">
@@ -5952,7 +5930,7 @@
                       <a:r>
                         <a:rPr sz="1300" b="1">
                           <a:solidFill>
-                            <a:srgbClr val="1F1F1F"/>
+                            <a:srgbClr val="FFFFFF"/>
                           </a:solidFill>
                           <a:latin typeface="Calibri"/>
                         </a:rPr>
@@ -5962,7 +5940,7 @@
                   </a:txBody>
                   <a:tcPr marL="91440" marR="91440" marT="41148" marB="41148" anchor="ctr">
                     <a:solidFill>
-                      <a:srgbClr val="EC7000"/>
+                      <a:srgbClr val="FF6200"/>
                     </a:solidFill>
                     <a:lnL>
                       <a:noFill/>
@@ -6001,7 +5979,7 @@
                       <a:r>
                         <a:rPr sz="1300" b="1">
                           <a:solidFill>
-                            <a:srgbClr val="1F1F1F"/>
+                            <a:srgbClr val="FFFFFF"/>
                           </a:solidFill>
                           <a:latin typeface="Calibri"/>
                         </a:rPr>
@@ -6011,7 +5989,7 @@
                   </a:txBody>
                   <a:tcPr marL="91440" marR="91440" marT="41148" marB="41148" anchor="ctr">
                     <a:solidFill>
-                      <a:srgbClr val="EC7000"/>
+                      <a:srgbClr val="FF6200"/>
                     </a:solidFill>
                     <a:lnL>
                       <a:noFill/>
@@ -6244,7 +6222,7 @@
                   </a:tcPr>
                 </a:tc>
               </a:tr>
-              <a:tr h="470916">
+              <a:tr h="283464">
                 <a:tc>
                   <a:txBody>
                     <a:bodyPr wrap="square">
@@ -6317,29 +6295,7 @@
                           </a:solidFill>
                           <a:latin typeface="Calibri"/>
                         </a:rPr>
-                        <a:t>Classe fechada; séries têm prazos próprios nos suplementos; público profissional nos termos do</a:t>
-                      </a:r>
-                    </a:p>
-                    <a:p>
-                      <a:pPr algn="ctr">
-                        <a:lnSpc>
-                          <a:spcPct val="100000"/>
-                        </a:lnSpc>
-                        <a:spcBef>
-                          <a:spcPts val="0"/>
-                        </a:spcBef>
-                        <a:spcAft>
-                          <a:spcPts val="0"/>
-                        </a:spcAft>
-                      </a:pPr>
-                      <a:r>
-                        <a:rPr sz="1300" b="0">
-                          <a:solidFill>
-                            <a:srgbClr val="1F1F1F"/>
-                          </a:solidFill>
-                          <a:latin typeface="Calibri"/>
-                        </a:rPr>
-                        <a:t>regulamento.</a:t>
+                        <a:t>Classe fechada; público profissional nos termos do regulamento.</a:t>
                       </a:r>
                     </a:p>
                   </a:txBody>
@@ -6821,7 +6777,7 @@
         </p:nvGraphicFramePr>
         <p:xfrm>
           <a:off x="438912" y="932688"/>
-          <a:ext cx="11313871" cy="1901952"/>
+          <a:ext cx="11313871" cy="1527048"/>
         </p:xfrm>
         <a:graphic>
           <a:graphicData uri="http://schemas.openxmlformats.org/drawingml/2006/table">
@@ -6855,7 +6811,7 @@
                       <a:r>
                         <a:rPr sz="1300" b="1">
                           <a:solidFill>
-                            <a:srgbClr val="1F1F1F"/>
+                            <a:srgbClr val="FFFFFF"/>
                           </a:solidFill>
                           <a:latin typeface="Calibri"/>
                         </a:rPr>
@@ -6865,7 +6821,7 @@
                   </a:txBody>
                   <a:tcPr marL="91440" marR="91440" marT="41148" marB="41148" anchor="ctr">
                     <a:solidFill>
-                      <a:srgbClr val="EC7000"/>
+                      <a:srgbClr val="FF6200"/>
                     </a:solidFill>
                     <a:lnL>
                       <a:noFill/>
@@ -6904,7 +6860,7 @@
                       <a:r>
                         <a:rPr sz="1300" b="1">
                           <a:solidFill>
-                            <a:srgbClr val="1F1F1F"/>
+                            <a:srgbClr val="FFFFFF"/>
                           </a:solidFill>
                           <a:latin typeface="Calibri"/>
                         </a:rPr>
@@ -6914,7 +6870,7 @@
                   </a:txBody>
                   <a:tcPr marL="91440" marR="91440" marT="41148" marB="41148" anchor="ctr">
                     <a:solidFill>
-                      <a:srgbClr val="EC7000"/>
+                      <a:srgbClr val="FF6200"/>
                     </a:solidFill>
                     <a:lnL>
                       <a:noFill/>
@@ -7029,7 +6985,7 @@
                   </a:tcPr>
                 </a:tc>
               </a:tr>
-              <a:tr h="470916">
+              <a:tr h="283464">
                 <a:tc>
                   <a:txBody>
                     <a:bodyPr wrap="square">
@@ -7102,29 +7058,7 @@
                           </a:solidFill>
                           <a:latin typeface="Calibri"/>
                         </a:rPr>
-                        <a:t>Sênior: benchmark/spread no suplemento, não localizado; subordinadas recebem residual sem parâmetro</a:t>
-                      </a:r>
-                    </a:p>
-                    <a:p>
-                      <a:pPr algn="ctr">
-                        <a:lnSpc>
-                          <a:spcPct val="100000"/>
-                        </a:lnSpc>
-                        <a:spcBef>
-                          <a:spcPts val="0"/>
-                        </a:spcBef>
-                        <a:spcAft>
-                          <a:spcPts val="0"/>
-                        </a:spcAft>
-                      </a:pPr>
-                      <a:r>
-                        <a:rPr sz="1300" b="0">
-                          <a:solidFill>
-                            <a:srgbClr val="1F1F1F"/>
-                          </a:solidFill>
-                          <a:latin typeface="Calibri"/>
-                        </a:rPr>
-                        <a:t>definido.</a:t>
+                        <a:t>subordinadas recebem residual sem parâmetro definido.</a:t>
                       </a:r>
                     </a:p>
                   </a:txBody>
@@ -7147,7 +7081,7 @@
                   </a:tcPr>
                 </a:tc>
               </a:tr>
-              <a:tr h="470916">
+              <a:tr h="283464">
                 <a:tc>
                   <a:txBody>
                     <a:bodyPr wrap="square">
@@ -7220,29 +7154,7 @@
                           </a:solidFill>
                           <a:latin typeface="Calibri"/>
                         </a:rPr>
-                        <a:t>Emissão autorizada de subordinadas até R$ 1 bi é autorização, com volume efetivo/VNU não</a:t>
-                      </a:r>
-                    </a:p>
-                    <a:p>
-                      <a:pPr algn="ctr">
-                        <a:lnSpc>
-                          <a:spcPct val="100000"/>
-                        </a:lnSpc>
-                        <a:spcBef>
-                          <a:spcPts val="0"/>
-                        </a:spcBef>
-                        <a:spcAft>
-                          <a:spcPts val="0"/>
-                        </a:spcAft>
-                      </a:pPr>
-                      <a:r>
-                        <a:rPr sz="1300" b="0">
-                          <a:solidFill>
-                            <a:srgbClr val="1F1F1F"/>
-                          </a:solidFill>
-                          <a:latin typeface="Calibri"/>
-                        </a:rPr>
-                        <a:t>confirmados.</a:t>
+                        <a:t>Emissão autorizada de subordinadas até R$ 1 bi é autorização</a:t>
                       </a:r>
                     </a:p>
                   </a:txBody>
@@ -7340,7 +7252,7 @@
                           </a:solidFill>
                           <a:latin typeface="Calibri"/>
                         </a:rPr>
-                        <a:t>Atos, suplementos e encerramentos específicos não confirmados nesta revisão.</a:t>
+                        <a:t>-</a:t>
                       </a:r>
                     </a:p>
                   </a:txBody>
@@ -7510,7 +7422,7 @@
         </p:nvGraphicFramePr>
         <p:xfrm>
           <a:off x="438912" y="932688"/>
-          <a:ext cx="11313871" cy="1431036"/>
+          <a:ext cx="11313871" cy="1243584"/>
         </p:xfrm>
         <a:graphic>
           <a:graphicData uri="http://schemas.openxmlformats.org/drawingml/2006/table">
@@ -7544,7 +7456,7 @@
                       <a:r>
                         <a:rPr sz="1300" b="1">
                           <a:solidFill>
-                            <a:srgbClr val="1F1F1F"/>
+                            <a:srgbClr val="FFFFFF"/>
                           </a:solidFill>
                           <a:latin typeface="Calibri"/>
                         </a:rPr>
@@ -7554,7 +7466,7 @@
                   </a:txBody>
                   <a:tcPr marL="91440" marR="91440" marT="41148" marB="41148" anchor="ctr">
                     <a:solidFill>
-                      <a:srgbClr val="EC7000"/>
+                      <a:srgbClr val="FF6200"/>
                     </a:solidFill>
                     <a:lnL>
                       <a:noFill/>
@@ -7593,7 +7505,7 @@
                       <a:r>
                         <a:rPr sz="1300" b="1">
                           <a:solidFill>
-                            <a:srgbClr val="1F1F1F"/>
+                            <a:srgbClr val="FFFFFF"/>
                           </a:solidFill>
                           <a:latin typeface="Calibri"/>
                         </a:rPr>
@@ -7603,7 +7515,7 @@
                   </a:txBody>
                   <a:tcPr marL="91440" marR="91440" marT="41148" marB="41148" anchor="ctr">
                     <a:solidFill>
-                      <a:srgbClr val="EC7000"/>
+                      <a:srgbClr val="FF6200"/>
                     </a:solidFill>
                     <a:lnL>
                       <a:noFill/>
@@ -7695,7 +7607,7 @@
                           </a:solidFill>
                           <a:latin typeface="Calibri"/>
                         </a:rPr>
-                        <a:t>Prazo remetido ao suplemento de cada série.</a:t>
+                        <a:t>-</a:t>
                       </a:r>
                     </a:p>
                   </a:txBody>
@@ -7718,7 +7630,7 @@
                   </a:tcPr>
                 </a:tc>
               </a:tr>
-              <a:tr h="470916">
+              <a:tr h="283464">
                 <a:tc>
                   <a:txBody>
                     <a:bodyPr wrap="square">
@@ -7791,29 +7703,7 @@
                           </a:solidFill>
                           <a:latin typeface="Calibri"/>
                         </a:rPr>
-                        <a:t>Cronograma por suplemento; aceleração pode dobrar parcelas e antecipar início após evento de</a:t>
-                      </a:r>
-                    </a:p>
-                    <a:p>
-                      <a:pPr algn="ctr">
-                        <a:lnSpc>
-                          <a:spcPct val="100000"/>
-                        </a:lnSpc>
-                        <a:spcBef>
-                          <a:spcPts val="0"/>
-                        </a:spcBef>
-                        <a:spcAft>
-                          <a:spcPts val="0"/>
-                        </a:spcAft>
-                      </a:pPr>
-                      <a:r>
-                        <a:rPr sz="1300" b="0">
-                          <a:solidFill>
-                            <a:srgbClr val="1F1F1F"/>
-                          </a:solidFill>
-                          <a:latin typeface="Calibri"/>
-                        </a:rPr>
-                        <a:t>avaliação.</a:t>
+                        <a:t>aceleração pode dobrar parcelas e antecipar início após evento de avaliação.</a:t>
                       </a:r>
                     </a:p>
                   </a:txBody>
@@ -7911,7 +7801,7 @@
                           </a:solidFill>
                           <a:latin typeface="Calibri"/>
                         </a:rPr>
-                        <a:t>Vencimento por série no suplemento; cronograma fechado não identificado.</a:t>
+                        <a:t>-</a:t>
                       </a:r>
                     </a:p>
                   </a:txBody>
@@ -8115,7 +8005,7 @@
                       <a:r>
                         <a:rPr sz="1300" b="1">
                           <a:solidFill>
-                            <a:srgbClr val="1F1F1F"/>
+                            <a:srgbClr val="FFFFFF"/>
                           </a:solidFill>
                           <a:latin typeface="Calibri"/>
                         </a:rPr>
@@ -8125,7 +8015,7 @@
                   </a:txBody>
                   <a:tcPr marL="91440" marR="91440" marT="41148" marB="41148" anchor="ctr">
                     <a:solidFill>
-                      <a:srgbClr val="EC7000"/>
+                      <a:srgbClr val="FF6200"/>
                     </a:solidFill>
                     <a:lnL>
                       <a:noFill/>
@@ -8164,7 +8054,7 @@
                       <a:r>
                         <a:rPr sz="1300" b="1">
                           <a:solidFill>
-                            <a:srgbClr val="1F1F1F"/>
+                            <a:srgbClr val="FFFFFF"/>
                           </a:solidFill>
                           <a:latin typeface="Calibri"/>
                         </a:rPr>
@@ -8174,7 +8064,7 @@
                   </a:txBody>
                   <a:tcPr marL="91440" marR="91440" marT="41148" marB="41148" anchor="ctr">
                     <a:solidFill>
-                      <a:srgbClr val="EC7000"/>
+                      <a:srgbClr val="FF6200"/>
                     </a:solidFill>
                     <a:lnL>
                       <a:noFill/>
@@ -8782,7 +8672,7 @@
                       <a:r>
                         <a:rPr sz="1300" b="1">
                           <a:solidFill>
-                            <a:srgbClr val="1F1F1F"/>
+                            <a:srgbClr val="FFFFFF"/>
                           </a:solidFill>
                           <a:latin typeface="Calibri"/>
                         </a:rPr>
@@ -8792,7 +8682,7 @@
                   </a:txBody>
                   <a:tcPr marL="91440" marR="91440" marT="41148" marB="41148" anchor="ctr">
                     <a:solidFill>
-                      <a:srgbClr val="EC7000"/>
+                      <a:srgbClr val="FF6200"/>
                     </a:solidFill>
                     <a:lnL>
                       <a:noFill/>
@@ -8831,7 +8721,7 @@
                       <a:r>
                         <a:rPr sz="1300" b="1">
                           <a:solidFill>
-                            <a:srgbClr val="1F1F1F"/>
+                            <a:srgbClr val="FFFFFF"/>
                           </a:solidFill>
                           <a:latin typeface="Calibri"/>
                         </a:rPr>
@@ -8841,7 +8731,7 @@
                   </a:txBody>
                   <a:tcPr marL="91440" marR="91440" marT="41148" marB="41148" anchor="ctr">
                     <a:solidFill>
-                      <a:srgbClr val="EC7000"/>
+                      <a:srgbClr val="FF6200"/>
                     </a:solidFill>
                     <a:lnL>
                       <a:noFill/>
